--- a/05_Linkedin_Posts/02_Open_Foam.pptx
+++ b/05_Linkedin_Posts/02_Open_Foam.pptx
@@ -261,7 +261,7 @@
           <a:p>
             <a:fld id="{9D4686FF-3DC0-4D03-9102-64E826D8EE6E}" type="datetimeFigureOut">
               <a:rPr lang="LID4096" smtClean="0"/>
-              <a:t>06/24/2026</a:t>
+              <a:t>09/04/2026</a:t>
             </a:fld>
             <a:endParaRPr lang="LID4096"/>
           </a:p>
@@ -461,7 +461,7 @@
           <a:p>
             <a:fld id="{9D4686FF-3DC0-4D03-9102-64E826D8EE6E}" type="datetimeFigureOut">
               <a:rPr lang="LID4096" smtClean="0"/>
-              <a:t>06/24/2026</a:t>
+              <a:t>09/04/2026</a:t>
             </a:fld>
             <a:endParaRPr lang="LID4096"/>
           </a:p>
@@ -671,7 +671,7 @@
           <a:p>
             <a:fld id="{9D4686FF-3DC0-4D03-9102-64E826D8EE6E}" type="datetimeFigureOut">
               <a:rPr lang="LID4096" smtClean="0"/>
-              <a:t>06/24/2026</a:t>
+              <a:t>09/04/2026</a:t>
             </a:fld>
             <a:endParaRPr lang="LID4096"/>
           </a:p>
@@ -871,7 +871,7 @@
           <a:p>
             <a:fld id="{9D4686FF-3DC0-4D03-9102-64E826D8EE6E}" type="datetimeFigureOut">
               <a:rPr lang="LID4096" smtClean="0"/>
-              <a:t>06/24/2026</a:t>
+              <a:t>09/04/2026</a:t>
             </a:fld>
             <a:endParaRPr lang="LID4096"/>
           </a:p>
@@ -1147,7 +1147,7 @@
           <a:p>
             <a:fld id="{9D4686FF-3DC0-4D03-9102-64E826D8EE6E}" type="datetimeFigureOut">
               <a:rPr lang="LID4096" smtClean="0"/>
-              <a:t>06/24/2026</a:t>
+              <a:t>09/04/2026</a:t>
             </a:fld>
             <a:endParaRPr lang="LID4096"/>
           </a:p>
@@ -1415,7 +1415,7 @@
           <a:p>
             <a:fld id="{9D4686FF-3DC0-4D03-9102-64E826D8EE6E}" type="datetimeFigureOut">
               <a:rPr lang="LID4096" smtClean="0"/>
-              <a:t>06/24/2026</a:t>
+              <a:t>09/04/2026</a:t>
             </a:fld>
             <a:endParaRPr lang="LID4096"/>
           </a:p>
@@ -1830,7 +1830,7 @@
           <a:p>
             <a:fld id="{9D4686FF-3DC0-4D03-9102-64E826D8EE6E}" type="datetimeFigureOut">
               <a:rPr lang="LID4096" smtClean="0"/>
-              <a:t>06/24/2026</a:t>
+              <a:t>09/04/2026</a:t>
             </a:fld>
             <a:endParaRPr lang="LID4096"/>
           </a:p>
@@ -1972,7 +1972,7 @@
           <a:p>
             <a:fld id="{9D4686FF-3DC0-4D03-9102-64E826D8EE6E}" type="datetimeFigureOut">
               <a:rPr lang="LID4096" smtClean="0"/>
-              <a:t>06/24/2026</a:t>
+              <a:t>09/04/2026</a:t>
             </a:fld>
             <a:endParaRPr lang="LID4096"/>
           </a:p>
@@ -2085,7 +2085,7 @@
           <a:p>
             <a:fld id="{9D4686FF-3DC0-4D03-9102-64E826D8EE6E}" type="datetimeFigureOut">
               <a:rPr lang="LID4096" smtClean="0"/>
-              <a:t>06/24/2026</a:t>
+              <a:t>09/04/2026</a:t>
             </a:fld>
             <a:endParaRPr lang="LID4096"/>
           </a:p>
@@ -2398,7 +2398,7 @@
           <a:p>
             <a:fld id="{9D4686FF-3DC0-4D03-9102-64E826D8EE6E}" type="datetimeFigureOut">
               <a:rPr lang="LID4096" smtClean="0"/>
-              <a:t>06/24/2026</a:t>
+              <a:t>09/04/2026</a:t>
             </a:fld>
             <a:endParaRPr lang="LID4096"/>
           </a:p>
@@ -2687,7 +2687,7 @@
           <a:p>
             <a:fld id="{9D4686FF-3DC0-4D03-9102-64E826D8EE6E}" type="datetimeFigureOut">
               <a:rPr lang="LID4096" smtClean="0"/>
-              <a:t>06/24/2026</a:t>
+              <a:t>09/04/2026</a:t>
             </a:fld>
             <a:endParaRPr lang="LID4096"/>
           </a:p>
@@ -2930,7 +2930,7 @@
           <a:p>
             <a:fld id="{9D4686FF-3DC0-4D03-9102-64E826D8EE6E}" type="datetimeFigureOut">
               <a:rPr lang="LID4096" smtClean="0"/>
-              <a:t>06/24/2026</a:t>
+              <a:t>09/04/2026</a:t>
             </a:fld>
             <a:endParaRPr lang="LID4096"/>
           </a:p>
@@ -3403,8 +3403,8 @@
         </p:nvSpPr>
         <p:spPr>
           <a:xfrm>
-            <a:off x="302155" y="2512337"/>
-            <a:ext cx="5510170" cy="461665"/>
+            <a:off x="408690" y="2715301"/>
+            <a:ext cx="5322502" cy="523220"/>
           </a:xfrm>
           <a:prstGeom prst="rect">
             <a:avLst/>
@@ -3418,21 +3418,212 @@
           <a:lstStyle/>
           <a:p>
             <a:r>
-              <a:rPr lang="en-GB" sz="2400" b="1" i="0" u="none" strike="noStrike" baseline="0" dirty="0">
+              <a:rPr lang="en-GB" sz="2800" b="1" i="0" u="sng" strike="noStrike" baseline="0" dirty="0">
+                <a:effectLst>
+                  <a:outerShdw blurRad="38100" dist="38100" dir="2700000" algn="tl">
+                    <a:srgbClr val="000000">
+                      <a:alpha val="43137"/>
+                    </a:srgbClr>
+                  </a:outerShdw>
+                </a:effectLst>
                 <a:latin typeface="LMRoman12-Regular"/>
               </a:rPr>
-              <a:t>Field Operation and Manipulation - FOAM</a:t>
-            </a:r>
-            <a:endParaRPr lang="LID4096" sz="2400" b="1" dirty="0"/>
-          </a:p>
-        </p:txBody>
-      </p:sp>
+              <a:t>F</a:t>
+            </a:r>
+            <a:r>
+              <a:rPr lang="en-GB" sz="2800" b="1" i="0" u="none" strike="noStrike" baseline="0" dirty="0">
+                <a:latin typeface="LMRoman12-Regular"/>
+              </a:rPr>
+              <a:t>ield </a:t>
+            </a:r>
+            <a:r>
+              <a:rPr lang="en-GB" sz="2800" b="1" i="0" u="sng" strike="noStrike" baseline="0" dirty="0">
+                <a:effectLst>
+                  <a:outerShdw blurRad="38100" dist="38100" dir="2700000" algn="tl">
+                    <a:srgbClr val="000000">
+                      <a:alpha val="43137"/>
+                    </a:srgbClr>
+                  </a:outerShdw>
+                </a:effectLst>
+                <a:latin typeface="LMRoman12-Regular"/>
+              </a:rPr>
+              <a:t>O</a:t>
+            </a:r>
+            <a:r>
+              <a:rPr lang="en-GB" sz="2800" b="1" i="0" u="none" strike="noStrike" baseline="0" dirty="0">
+                <a:latin typeface="LMRoman12-Regular"/>
+              </a:rPr>
+              <a:t>peration </a:t>
+            </a:r>
+            <a:r>
+              <a:rPr lang="en-GB" sz="2800" b="1" i="0" u="sng" strike="noStrike" baseline="0" dirty="0">
+                <a:effectLst>
+                  <a:outerShdw blurRad="38100" dist="38100" dir="2700000" algn="tl">
+                    <a:srgbClr val="000000">
+                      <a:alpha val="43137"/>
+                    </a:srgbClr>
+                  </a:outerShdw>
+                </a:effectLst>
+                <a:latin typeface="LMRoman12-Regular"/>
+              </a:rPr>
+              <a:t>A</a:t>
+            </a:r>
+            <a:r>
+              <a:rPr lang="en-GB" sz="2800" b="1" i="0" u="none" strike="noStrike" baseline="0" dirty="0">
+                <a:latin typeface="LMRoman12-Regular"/>
+              </a:rPr>
+              <a:t>nd </a:t>
+            </a:r>
+            <a:r>
+              <a:rPr lang="en-GB" sz="2800" b="1" i="0" u="sng" strike="noStrike" baseline="0" dirty="0">
+                <a:effectLst>
+                  <a:outerShdw blurRad="38100" dist="38100" dir="2700000" algn="tl">
+                    <a:srgbClr val="000000">
+                      <a:alpha val="43137"/>
+                    </a:srgbClr>
+                  </a:outerShdw>
+                </a:effectLst>
+                <a:latin typeface="LMRoman12-Regular"/>
+              </a:rPr>
+              <a:t>M</a:t>
+            </a:r>
+            <a:r>
+              <a:rPr lang="en-GB" sz="2800" b="1" i="0" u="none" strike="noStrike" baseline="0" dirty="0">
+                <a:latin typeface="LMRoman12-Regular"/>
+              </a:rPr>
+              <a:t>anipulation</a:t>
+            </a:r>
+            <a:endParaRPr lang="LID4096" sz="2800" b="1" dirty="0"/>
+          </a:p>
+        </p:txBody>
+      </p:sp>
+      <p:grpSp>
+        <p:nvGrpSpPr>
+          <p:cNvPr id="7" name="Group 6">
+            <a:extLst>
+              <a:ext uri="{FF2B5EF4-FFF2-40B4-BE49-F238E27FC236}">
+                <a16:creationId xmlns:a16="http://schemas.microsoft.com/office/drawing/2014/main" id="{2AE8BF9E-F9BA-B702-A493-5025E9CC8625}"/>
+              </a:ext>
+            </a:extLst>
+          </p:cNvPr>
+          <p:cNvGrpSpPr>
+            <a:grpSpLocks noChangeAspect="1"/>
+          </p:cNvGrpSpPr>
+          <p:nvPr/>
+        </p:nvGrpSpPr>
+        <p:grpSpPr>
+          <a:xfrm>
+            <a:off x="565019" y="3429000"/>
+            <a:ext cx="3478797" cy="2896389"/>
+            <a:chOff x="570368" y="3228186"/>
+            <a:chExt cx="2453773" cy="2042971"/>
+          </a:xfrm>
+        </p:grpSpPr>
+        <p:pic>
+          <p:nvPicPr>
+            <p:cNvPr id="8" name="Picture 7">
+              <a:extLst>
+                <a:ext uri="{FF2B5EF4-FFF2-40B4-BE49-F238E27FC236}">
+                  <a16:creationId xmlns:a16="http://schemas.microsoft.com/office/drawing/2014/main" id="{5A4510B1-08AD-722C-2323-BF07527ECC22}"/>
+                </a:ext>
+              </a:extLst>
+            </p:cNvPr>
+            <p:cNvPicPr>
+              <a:picLocks noChangeAspect="1"/>
+            </p:cNvPicPr>
+            <p:nvPr/>
+          </p:nvPicPr>
+          <p:blipFill>
+            <a:blip r:embed="rId3"/>
+            <a:stretch>
+              <a:fillRect/>
+            </a:stretch>
+          </p:blipFill>
+          <p:spPr>
+            <a:xfrm>
+              <a:off x="1276539" y="3228186"/>
+              <a:ext cx="1747602" cy="2042971"/>
+            </a:xfrm>
+            <a:prstGeom prst="rect">
+              <a:avLst/>
+            </a:prstGeom>
+            <a:ln>
+              <a:solidFill>
+                <a:schemeClr val="tx1"/>
+              </a:solidFill>
+            </a:ln>
+            <a:effectLst>
+              <a:outerShdw blurRad="50800" dist="38100" dir="8100000" algn="tr" rotWithShape="0">
+                <a:prstClr val="black">
+                  <a:alpha val="40000"/>
+                </a:prstClr>
+              </a:outerShdw>
+            </a:effectLst>
+          </p:spPr>
+        </p:pic>
+        <p:sp>
+          <p:nvSpPr>
+            <p:cNvPr id="3" name="Arrow: Right 2">
+              <a:extLst>
+                <a:ext uri="{FF2B5EF4-FFF2-40B4-BE49-F238E27FC236}">
+                  <a16:creationId xmlns:a16="http://schemas.microsoft.com/office/drawing/2014/main" id="{38E16340-B04A-BD7E-C439-B2F0D2752FF4}"/>
+                </a:ext>
+              </a:extLst>
+            </p:cNvPr>
+            <p:cNvSpPr/>
+            <p:nvPr/>
+          </p:nvSpPr>
+          <p:spPr>
+            <a:xfrm>
+              <a:off x="570368" y="4721351"/>
+              <a:ext cx="491402" cy="461665"/>
+            </a:xfrm>
+            <a:prstGeom prst="rightArrow">
+              <a:avLst/>
+            </a:prstGeom>
+            <a:solidFill>
+              <a:srgbClr val="0000FF"/>
+            </a:solidFill>
+            <a:effectLst>
+              <a:outerShdw blurRad="50800" dist="38100" dir="8100000" algn="tr" rotWithShape="0">
+                <a:prstClr val="black">
+                  <a:alpha val="40000"/>
+                </a:prstClr>
+              </a:outerShdw>
+            </a:effectLst>
+          </p:spPr>
+          <p:style>
+            <a:lnRef idx="2">
+              <a:schemeClr val="accent1">
+                <a:shade val="15000"/>
+              </a:schemeClr>
+            </a:lnRef>
+            <a:fillRef idx="1">
+              <a:schemeClr val="accent1"/>
+            </a:fillRef>
+            <a:effectRef idx="0">
+              <a:schemeClr val="accent1"/>
+            </a:effectRef>
+            <a:fontRef idx="minor">
+              <a:schemeClr val="lt1"/>
+            </a:fontRef>
+          </p:style>
+          <p:txBody>
+            <a:bodyPr rtlCol="0" anchor="ctr"/>
+            <a:lstStyle/>
+            <a:p>
+              <a:pPr algn="ctr"/>
+              <a:endParaRPr lang="LID4096"/>
+            </a:p>
+          </p:txBody>
+        </p:sp>
+      </p:grpSp>
       <p:pic>
         <p:nvPicPr>
-          <p:cNvPr id="8" name="Picture 7">
-            <a:extLst>
-              <a:ext uri="{FF2B5EF4-FFF2-40B4-BE49-F238E27FC236}">
-                <a16:creationId xmlns:a16="http://schemas.microsoft.com/office/drawing/2014/main" id="{5A4510B1-08AD-722C-2323-BF07527ECC22}"/>
+          <p:cNvPr id="6" name="Picture 5">
+            <a:extLst>
+              <a:ext uri="{FF2B5EF4-FFF2-40B4-BE49-F238E27FC236}">
+                <a16:creationId xmlns:a16="http://schemas.microsoft.com/office/drawing/2014/main" id="{8152A27A-57FB-DE69-67B1-731C23C8C83A}"/>
               </a:ext>
             </a:extLst>
           </p:cNvPr>
@@ -3442,15 +3633,16 @@
           <p:nvPr/>
         </p:nvPicPr>
         <p:blipFill>
-          <a:blip r:embed="rId3"/>
+          <a:blip r:embed="rId4"/>
+          <a:srcRect l="5792" t="1090"/>
           <a:stretch>
             <a:fillRect/>
           </a:stretch>
         </p:blipFill>
         <p:spPr>
           <a:xfrm>
-            <a:off x="1276539" y="3228186"/>
-            <a:ext cx="1747602" cy="2042971"/>
+            <a:off x="6116811" y="2373934"/>
+            <a:ext cx="5510170" cy="3950327"/>
           </a:xfrm>
           <a:prstGeom prst="rect">
             <a:avLst/>
@@ -3469,94 +3661,201 @@
           </a:effectLst>
         </p:spPr>
       </p:pic>
-      <p:pic>
-        <p:nvPicPr>
-          <p:cNvPr id="10" name="Picture 9">
-            <a:extLst>
-              <a:ext uri="{FF2B5EF4-FFF2-40B4-BE49-F238E27FC236}">
-                <a16:creationId xmlns:a16="http://schemas.microsoft.com/office/drawing/2014/main" id="{A62E864F-8C1A-F4C5-0CF2-AA9D524EA825}"/>
-              </a:ext>
-            </a:extLst>
-          </p:cNvPr>
-          <p:cNvPicPr>
-            <a:picLocks noChangeAspect="1"/>
-          </p:cNvPicPr>
+      <p:sp>
+        <p:nvSpPr>
+          <p:cNvPr id="9" name="TextBox 8">
+            <a:extLst>
+              <a:ext uri="{FF2B5EF4-FFF2-40B4-BE49-F238E27FC236}">
+                <a16:creationId xmlns:a16="http://schemas.microsoft.com/office/drawing/2014/main" id="{2C7FB053-56FD-2B57-6107-3979686561C6}"/>
+              </a:ext>
+            </a:extLst>
+          </p:cNvPr>
+          <p:cNvSpPr txBox="1"/>
           <p:nvPr/>
-        </p:nvPicPr>
-        <p:blipFill>
-          <a:blip r:embed="rId4"/>
-          <a:stretch>
-            <a:fillRect/>
-          </a:stretch>
-        </p:blipFill>
+        </p:nvSpPr>
         <p:spPr>
           <a:xfrm>
-            <a:off x="3238910" y="3228186"/>
-            <a:ext cx="4513187" cy="2328503"/>
+            <a:off x="4824109" y="2288591"/>
+            <a:ext cx="1212981" cy="523220"/>
           </a:xfrm>
           <a:prstGeom prst="rect">
             <a:avLst/>
           </a:prstGeom>
-          <a:ln>
-            <a:solidFill>
-              <a:schemeClr val="tx1"/>
-            </a:solidFill>
-          </a:ln>
-          <a:effectLst>
-            <a:outerShdw blurRad="50800" dist="38100" dir="8100000" algn="tr" rotWithShape="0">
-              <a:prstClr val="black">
-                <a:alpha val="40000"/>
-              </a:prstClr>
-            </a:outerShdw>
-          </a:effectLst>
+          <a:noFill/>
         </p:spPr>
-      </p:pic>
-      <p:sp>
-        <p:nvSpPr>
-          <p:cNvPr id="3" name="Arrow: Right 2">
-            <a:extLst>
-              <a:ext uri="{FF2B5EF4-FFF2-40B4-BE49-F238E27FC236}">
-                <a16:creationId xmlns:a16="http://schemas.microsoft.com/office/drawing/2014/main" id="{38E16340-B04A-BD7E-C439-B2F0D2752FF4}"/>
-              </a:ext>
-            </a:extLst>
-          </p:cNvPr>
-          <p:cNvSpPr/>
+        <p:txBody>
+          <a:bodyPr wrap="square">
+            <a:spAutoFit/>
+          </a:bodyPr>
+          <a:lstStyle/>
+          <a:p>
+            <a:r>
+              <a:rPr lang="en-GB" sz="2800" b="1" u="sng" dirty="0">
+                <a:effectLst>
+                  <a:outerShdw blurRad="38100" dist="38100" dir="2700000" algn="tl">
+                    <a:srgbClr val="000000">
+                      <a:alpha val="43137"/>
+                    </a:srgbClr>
+                  </a:outerShdw>
+                </a:effectLst>
+                <a:latin typeface="LMRoman12-Regular"/>
+              </a:rPr>
+              <a:t>Open</a:t>
+            </a:r>
+            <a:endParaRPr lang="LID4096" sz="2800" b="1" u="sng" dirty="0">
+              <a:effectLst>
+                <a:outerShdw blurRad="38100" dist="38100" dir="2700000" algn="tl">
+                  <a:srgbClr val="000000">
+                    <a:alpha val="43137"/>
+                  </a:srgbClr>
+                </a:outerShdw>
+              </a:effectLst>
+            </a:endParaRPr>
+          </a:p>
+        </p:txBody>
+      </p:sp>
+      <p:sp>
+        <p:nvSpPr>
+          <p:cNvPr id="10" name="TextBox 9">
+            <a:extLst>
+              <a:ext uri="{FF2B5EF4-FFF2-40B4-BE49-F238E27FC236}">
+                <a16:creationId xmlns:a16="http://schemas.microsoft.com/office/drawing/2014/main" id="{C5135D20-BB5B-6452-A701-2E4A2634173B}"/>
+              </a:ext>
+            </a:extLst>
+          </p:cNvPr>
+          <p:cNvSpPr txBox="1"/>
           <p:nvPr/>
         </p:nvSpPr>
         <p:spPr>
           <a:xfrm>
-            <a:off x="570368" y="4721351"/>
-            <a:ext cx="491402" cy="461665"/>
+            <a:off x="5926529" y="264902"/>
+            <a:ext cx="3561503" cy="1477328"/>
           </a:xfrm>
-          <a:prstGeom prst="rightArrow">
+          <a:prstGeom prst="rect">
             <a:avLst/>
           </a:prstGeom>
           <a:solidFill>
-            <a:srgbClr val="0000FF"/>
+            <a:schemeClr val="tx1"/>
           </a:solidFill>
         </p:spPr>
-        <p:style>
-          <a:lnRef idx="2">
-            <a:schemeClr val="accent1">
-              <a:shade val="15000"/>
-            </a:schemeClr>
-          </a:lnRef>
-          <a:fillRef idx="1">
-            <a:schemeClr val="accent1"/>
-          </a:fillRef>
-          <a:effectRef idx="0">
-            <a:schemeClr val="accent1"/>
-          </a:effectRef>
-          <a:fontRef idx="minor">
-            <a:schemeClr val="lt1"/>
-          </a:fontRef>
-        </p:style>
-        <p:txBody>
-          <a:bodyPr rtlCol="0" anchor="ctr"/>
-          <a:lstStyle/>
-          <a:p>
-            <a:pPr algn="ctr"/>
-            <a:endParaRPr lang="LID4096"/>
+        <p:txBody>
+          <a:bodyPr wrap="square" rtlCol="0">
+            <a:spAutoFit/>
+          </a:bodyPr>
+          <a:lstStyle/>
+          <a:p>
+            <a:r>
+              <a:rPr lang="en-US" dirty="0">
+                <a:solidFill>
+                  <a:schemeClr val="bg1"/>
+                </a:solidFill>
+              </a:rPr>
+              <a:t> ==========                 </a:t>
+            </a:r>
+          </a:p>
+          <a:p>
+            <a:r>
+              <a:rPr lang="en-US" dirty="0">
+                <a:solidFill>
+                  <a:schemeClr val="bg1"/>
+                </a:solidFill>
+              </a:rPr>
+              <a:t>  \ \              /    </a:t>
+            </a:r>
+            <a:r>
+              <a:rPr lang="en-US" b="1" dirty="0">
+                <a:solidFill>
+                  <a:schemeClr val="bg1"/>
+                </a:solidFill>
+              </a:rPr>
+              <a:t>F</a:t>
+            </a:r>
+            <a:r>
+              <a:rPr lang="en-US" dirty="0">
+                <a:solidFill>
+                  <a:schemeClr val="bg1"/>
+                </a:solidFill>
+              </a:rPr>
+              <a:t>    ield             </a:t>
+            </a:r>
+          </a:p>
+          <a:p>
+            <a:r>
+              <a:rPr lang="en-US" dirty="0">
+                <a:solidFill>
+                  <a:schemeClr val="bg1"/>
+                </a:solidFill>
+              </a:rPr>
+              <a:t>    \ \          /      </a:t>
+            </a:r>
+            <a:r>
+              <a:rPr lang="en-US" b="1" dirty="0">
+                <a:solidFill>
+                  <a:schemeClr val="bg1"/>
+                </a:solidFill>
+              </a:rPr>
+              <a:t>O</a:t>
+            </a:r>
+            <a:r>
+              <a:rPr lang="en-US" dirty="0">
+                <a:solidFill>
+                  <a:schemeClr val="bg1"/>
+                </a:solidFill>
+              </a:rPr>
+              <a:t>   peration    </a:t>
+            </a:r>
+          </a:p>
+          <a:p>
+            <a:r>
+              <a:rPr lang="en-US" dirty="0">
+                <a:solidFill>
+                  <a:schemeClr val="bg1"/>
+                </a:solidFill>
+              </a:rPr>
+              <a:t>      \ \      /        </a:t>
+            </a:r>
+            <a:r>
+              <a:rPr lang="en-US" b="1" dirty="0">
+                <a:solidFill>
+                  <a:schemeClr val="bg1"/>
+                </a:solidFill>
+              </a:rPr>
+              <a:t>A</a:t>
+            </a:r>
+            <a:r>
+              <a:rPr lang="en-US" dirty="0">
+                <a:solidFill>
+                  <a:schemeClr val="bg1"/>
+                </a:solidFill>
+              </a:rPr>
+              <a:t>   nd          </a:t>
+            </a:r>
+          </a:p>
+          <a:p>
+            <a:r>
+              <a:rPr lang="en-US" dirty="0">
+                <a:solidFill>
+                  <a:schemeClr val="bg1"/>
+                </a:solidFill>
+              </a:rPr>
+              <a:t>        \ \  /          </a:t>
+            </a:r>
+            <a:r>
+              <a:rPr lang="en-US" b="1" dirty="0">
+                <a:solidFill>
+                  <a:schemeClr val="bg1"/>
+                </a:solidFill>
+              </a:rPr>
+              <a:t>M</a:t>
+            </a:r>
+            <a:r>
+              <a:rPr lang="en-US" dirty="0">
+                <a:solidFill>
+                  <a:schemeClr val="bg1"/>
+                </a:solidFill>
+              </a:rPr>
+              <a:t>  anipulation  </a:t>
+            </a:r>
           </a:p>
         </p:txBody>
       </p:sp>
